--- a/Eagles Wings-CH.pptx
+++ b/Eagles Wings-CH.pptx
@@ -10,7 +10,6 @@
     <p:sldId id="276" r:id="rId4"/>
     <p:sldId id="277" r:id="rId5"/>
     <p:sldId id="278" r:id="rId6"/>
-    <p:sldId id="279" r:id="rId7"/>
   </p:sldIdLst>
   <p:sldSz cx="12192000" cy="6858000"/>
   <p:notesSz cx="6858000" cy="9144000"/>
@@ -264,7 +263,7 @@
           <a:p>
             <a:fld id="{E759A0DE-F190-5444-87AC-4719D5F20D15}" type="datetimeFigureOut">
               <a:rPr lang="en-US" smtClean="0"/>
-              <a:t>6/6/26</a:t>
+              <a:t>10/1/26</a:t>
             </a:fld>
             <a:endParaRPr lang="en-US"/>
           </a:p>
@@ -462,7 +461,7 @@
           <a:p>
             <a:fld id="{E759A0DE-F190-5444-87AC-4719D5F20D15}" type="datetimeFigureOut">
               <a:rPr lang="en-US" smtClean="0"/>
-              <a:t>6/6/26</a:t>
+              <a:t>10/1/26</a:t>
             </a:fld>
             <a:endParaRPr lang="en-US"/>
           </a:p>
@@ -670,7 +669,7 @@
           <a:p>
             <a:fld id="{E759A0DE-F190-5444-87AC-4719D5F20D15}" type="datetimeFigureOut">
               <a:rPr lang="en-US" smtClean="0"/>
-              <a:t>6/6/26</a:t>
+              <a:t>10/1/26</a:t>
             </a:fld>
             <a:endParaRPr lang="en-US"/>
           </a:p>
@@ -868,7 +867,7 @@
           <a:p>
             <a:fld id="{E759A0DE-F190-5444-87AC-4719D5F20D15}" type="datetimeFigureOut">
               <a:rPr lang="en-US" smtClean="0"/>
-              <a:t>6/6/26</a:t>
+              <a:t>10/1/26</a:t>
             </a:fld>
             <a:endParaRPr lang="en-US"/>
           </a:p>
@@ -1143,7 +1142,7 @@
           <a:p>
             <a:fld id="{E759A0DE-F190-5444-87AC-4719D5F20D15}" type="datetimeFigureOut">
               <a:rPr lang="en-US" smtClean="0"/>
-              <a:t>6/6/26</a:t>
+              <a:t>10/1/26</a:t>
             </a:fld>
             <a:endParaRPr lang="en-US"/>
           </a:p>
@@ -1408,7 +1407,7 @@
           <a:p>
             <a:fld id="{E759A0DE-F190-5444-87AC-4719D5F20D15}" type="datetimeFigureOut">
               <a:rPr lang="en-US" smtClean="0"/>
-              <a:t>6/6/26</a:t>
+              <a:t>10/1/26</a:t>
             </a:fld>
             <a:endParaRPr lang="en-US"/>
           </a:p>
@@ -1820,7 +1819,7 @@
           <a:p>
             <a:fld id="{E759A0DE-F190-5444-87AC-4719D5F20D15}" type="datetimeFigureOut">
               <a:rPr lang="en-US" smtClean="0"/>
-              <a:t>6/6/26</a:t>
+              <a:t>10/1/26</a:t>
             </a:fld>
             <a:endParaRPr lang="en-US"/>
           </a:p>
@@ -1961,7 +1960,7 @@
           <a:p>
             <a:fld id="{E759A0DE-F190-5444-87AC-4719D5F20D15}" type="datetimeFigureOut">
               <a:rPr lang="en-US" smtClean="0"/>
-              <a:t>6/6/26</a:t>
+              <a:t>10/1/26</a:t>
             </a:fld>
             <a:endParaRPr lang="en-US"/>
           </a:p>
@@ -2074,7 +2073,7 @@
           <a:p>
             <a:fld id="{E759A0DE-F190-5444-87AC-4719D5F20D15}" type="datetimeFigureOut">
               <a:rPr lang="en-US" smtClean="0"/>
-              <a:t>6/6/26</a:t>
+              <a:t>10/1/26</a:t>
             </a:fld>
             <a:endParaRPr lang="en-US"/>
           </a:p>
@@ -2385,7 +2384,7 @@
           <a:p>
             <a:fld id="{E759A0DE-F190-5444-87AC-4719D5F20D15}" type="datetimeFigureOut">
               <a:rPr lang="en-US" smtClean="0"/>
-              <a:t>6/6/26</a:t>
+              <a:t>10/1/26</a:t>
             </a:fld>
             <a:endParaRPr lang="en-US"/>
           </a:p>
@@ -2673,7 +2672,7 @@
           <a:p>
             <a:fld id="{E759A0DE-F190-5444-87AC-4719D5F20D15}" type="datetimeFigureOut">
               <a:rPr lang="en-US" smtClean="0"/>
-              <a:t>6/6/26</a:t>
+              <a:t>10/1/26</a:t>
             </a:fld>
             <a:endParaRPr lang="en-US"/>
           </a:p>
@@ -2914,7 +2913,7 @@
           <a:p>
             <a:fld id="{E759A0DE-F190-5444-87AC-4719D5F20D15}" type="datetimeFigureOut">
               <a:rPr lang="en-US" smtClean="0"/>
-              <a:t>6/6/26</a:t>
+              <a:t>10/1/26</a:t>
             </a:fld>
             <a:endParaRPr lang="en-US"/>
           </a:p>
@@ -4230,7 +4229,7 @@
         <p:spPr>
           <a:xfrm>
             <a:off x="682831" y="497702"/>
-            <a:ext cx="10826338" cy="5862596"/>
+            <a:ext cx="8112253" cy="5862596"/>
           </a:xfrm>
         </p:spPr>
         <p:txBody>
@@ -4354,199 +4353,49 @@
           </a:p>
         </p:txBody>
       </p:sp>
+      <p:sp>
+        <p:nvSpPr>
+          <p:cNvPr id="2" name="TextBox 1">
+            <a:extLst>
+              <a:ext uri="{FF2B5EF4-FFF2-40B4-BE49-F238E27FC236}">
+                <a16:creationId xmlns:a16="http://schemas.microsoft.com/office/drawing/2014/main" id="{E0FD6005-C918-72F4-2238-3D590655613D}"/>
+              </a:ext>
+            </a:extLst>
+          </p:cNvPr>
+          <p:cNvSpPr txBox="1"/>
+          <p:nvPr/>
+        </p:nvSpPr>
+        <p:spPr>
+          <a:xfrm>
+            <a:off x="9264315" y="6037132"/>
+            <a:ext cx="2616422" cy="646331"/>
+          </a:xfrm>
+          <a:prstGeom prst="rect">
+            <a:avLst/>
+          </a:prstGeom>
+          <a:noFill/>
+        </p:spPr>
+        <p:txBody>
+          <a:bodyPr wrap="none" rtlCol="0">
+            <a:spAutoFit/>
+          </a:bodyPr>
+          <a:lstStyle/>
+          <a:p>
+            <a:r>
+              <a:rPr lang="en-US" sz="3600" b="1" dirty="0">
+                <a:solidFill>
+                  <a:schemeClr val="bg1"/>
+                </a:solidFill>
+              </a:rPr>
+              <a:t>X2 and END</a:t>
+            </a:r>
+          </a:p>
+        </p:txBody>
+      </p:sp>
     </p:spTree>
     <p:extLst>
       <p:ext uri="{BB962C8B-B14F-4D97-AF65-F5344CB8AC3E}">
         <p14:creationId xmlns:p14="http://schemas.microsoft.com/office/powerpoint/2010/main" val="2054342333"/>
-      </p:ext>
-    </p:extLst>
-  </p:cSld>
-  <p:clrMapOvr>
-    <a:masterClrMapping/>
-  </p:clrMapOvr>
-</p:sld>
-</file>
-
-<file path=ppt/slides/slide6.xml><?xml version="1.0" encoding="utf-8"?>
-<p:sld xmlns:a="http://schemas.openxmlformats.org/drawingml/2006/main" xmlns:r="http://schemas.openxmlformats.org/officeDocument/2006/relationships" xmlns:p="http://schemas.openxmlformats.org/presentationml/2006/main">
-  <p:cSld>
-    <p:bg>
-      <p:bgPr>
-        <a:solidFill>
-          <a:schemeClr val="accent5">
-            <a:lumMod val="50000"/>
-          </a:schemeClr>
-        </a:solidFill>
-        <a:effectLst/>
-      </p:bgPr>
-    </p:bg>
-    <p:spTree>
-      <p:nvGrpSpPr>
-        <p:cNvPr id="1" name="">
-          <a:extLst>
-            <a:ext uri="{FF2B5EF4-FFF2-40B4-BE49-F238E27FC236}">
-              <a16:creationId xmlns:a16="http://schemas.microsoft.com/office/drawing/2014/main" id="{0AA19105-D6B9-F07D-A874-F3D0465EE2BE}"/>
-            </a:ext>
-          </a:extLst>
-        </p:cNvPr>
-        <p:cNvGrpSpPr/>
-        <p:nvPr/>
-      </p:nvGrpSpPr>
-      <p:grpSpPr>
-        <a:xfrm>
-          <a:off x="0" y="0"/>
-          <a:ext cx="0" cy="0"/>
-          <a:chOff x="0" y="0"/>
-          <a:chExt cx="0" cy="0"/>
-        </a:xfrm>
-      </p:grpSpPr>
-      <p:sp>
-        <p:nvSpPr>
-          <p:cNvPr id="3" name="Subtitle 2">
-            <a:extLst>
-              <a:ext uri="{FF2B5EF4-FFF2-40B4-BE49-F238E27FC236}">
-                <a16:creationId xmlns:a16="http://schemas.microsoft.com/office/drawing/2014/main" id="{3E9A8A34-AC28-EEC6-5C7D-913D36AB1953}"/>
-              </a:ext>
-            </a:extLst>
-          </p:cNvPr>
-          <p:cNvSpPr>
-            <a:spLocks noGrp="1"/>
-          </p:cNvSpPr>
-          <p:nvPr>
-            <p:ph type="subTitle" idx="1"/>
-          </p:nvPr>
-        </p:nvSpPr>
-        <p:spPr>
-          <a:xfrm>
-            <a:off x="682831" y="497702"/>
-            <a:ext cx="10826338" cy="5862596"/>
-          </a:xfrm>
-        </p:spPr>
-        <p:txBody>
-          <a:bodyPr>
-            <a:noAutofit/>
-          </a:bodyPr>
-          <a:lstStyle/>
-          <a:p>
-            <a:pPr algn="l"/>
-            <a:endParaRPr lang="en-US" sz="3200" dirty="0">
-              <a:solidFill>
-                <a:schemeClr val="bg1"/>
-              </a:solidFill>
-              <a:latin typeface="Avenir Medium" panose="02000503020000020003" pitchFamily="2" charset="0"/>
-              <a:ea typeface="Bodoni Ornaments" pitchFamily="2" charset="0"/>
-            </a:endParaRPr>
-          </a:p>
-          <a:p>
-            <a:pPr algn="l"/>
-            <a:r>
-              <a:rPr lang="en-US" sz="3200" dirty="0">
-                <a:solidFill>
-                  <a:srgbClr val="FFFF00"/>
-                </a:solidFill>
-                <a:latin typeface="Avenir Medium" panose="02000503020000020003" pitchFamily="2" charset="0"/>
-                <a:ea typeface="Bodoni Ornaments" pitchFamily="2" charset="0"/>
-              </a:rPr>
-              <a:t>G                  C</a:t>
-            </a:r>
-          </a:p>
-          <a:p>
-            <a:pPr algn="l"/>
-            <a:r>
-              <a:rPr lang="en-US" sz="3200" dirty="0">
-                <a:solidFill>
-                  <a:schemeClr val="bg1"/>
-                </a:solidFill>
-                <a:latin typeface="Avenir Medium" panose="02000503020000020003" pitchFamily="2" charset="0"/>
-                <a:ea typeface="Bodoni Ornaments" pitchFamily="2" charset="0"/>
-              </a:rPr>
-              <a:t>Come live in me </a:t>
-            </a:r>
-          </a:p>
-          <a:p>
-            <a:pPr algn="l"/>
-            <a:r>
-              <a:rPr lang="en-US" sz="3200" dirty="0">
-                <a:solidFill>
-                  <a:srgbClr val="FFFF00"/>
-                </a:solidFill>
-                <a:latin typeface="Avenir Medium" panose="02000503020000020003" pitchFamily="2" charset="0"/>
-                <a:ea typeface="Bodoni Ornaments" pitchFamily="2" charset="0"/>
-              </a:rPr>
-              <a:t>           Am         D</a:t>
-            </a:r>
-          </a:p>
-          <a:p>
-            <a:pPr algn="l"/>
-            <a:r>
-              <a:rPr lang="en-US" sz="3200" dirty="0">
-                <a:solidFill>
-                  <a:schemeClr val="bg1"/>
-                </a:solidFill>
-                <a:latin typeface="Avenir Medium" panose="02000503020000020003" pitchFamily="2" charset="0"/>
-                <a:ea typeface="Bodoni Ornaments" pitchFamily="2" charset="0"/>
-              </a:rPr>
-              <a:t>All my life, take over </a:t>
-            </a:r>
-          </a:p>
-          <a:p>
-            <a:pPr algn="l"/>
-            <a:r>
-              <a:rPr lang="en-US" sz="3200" dirty="0">
-                <a:solidFill>
-                  <a:srgbClr val="FFFF00"/>
-                </a:solidFill>
-                <a:latin typeface="Avenir Medium" panose="02000503020000020003" pitchFamily="2" charset="0"/>
-                <a:ea typeface="Bodoni Ornaments" pitchFamily="2" charset="0"/>
-              </a:rPr>
-              <a:t>G                         C</a:t>
-            </a:r>
-          </a:p>
-          <a:p>
-            <a:pPr algn="l"/>
-            <a:r>
-              <a:rPr lang="en-US" sz="3200" dirty="0">
-                <a:solidFill>
-                  <a:schemeClr val="bg1"/>
-                </a:solidFill>
-                <a:latin typeface="Avenir Medium" panose="02000503020000020003" pitchFamily="2" charset="0"/>
-                <a:ea typeface="Bodoni Ornaments" pitchFamily="2" charset="0"/>
-              </a:rPr>
-              <a:t>Come breathe in me </a:t>
-            </a:r>
-          </a:p>
-          <a:p>
-            <a:pPr algn="l"/>
-            <a:r>
-              <a:rPr lang="en-US" sz="3200" dirty="0">
-                <a:solidFill>
-                  <a:srgbClr val="FFFF00"/>
-                </a:solidFill>
-                <a:latin typeface="Avenir Medium" panose="02000503020000020003" pitchFamily="2" charset="0"/>
-                <a:ea typeface="Bodoni Ornaments" pitchFamily="2" charset="0"/>
-              </a:rPr>
-              <a:t>                Am      D         G</a:t>
-            </a:r>
-          </a:p>
-          <a:p>
-            <a:pPr algn="l"/>
-            <a:r>
-              <a:rPr lang="en-US" sz="3200" dirty="0">
-                <a:solidFill>
-                  <a:schemeClr val="bg1"/>
-                </a:solidFill>
-                <a:latin typeface="Avenir Medium" panose="02000503020000020003" pitchFamily="2" charset="0"/>
-                <a:ea typeface="Bodoni Ornaments" pitchFamily="2" charset="0"/>
-              </a:rPr>
-              <a:t>And I will rise on Eagles Wings </a:t>
-            </a:r>
-          </a:p>
-        </p:txBody>
-      </p:sp>
-    </p:spTree>
-    <p:extLst>
-      <p:ext uri="{BB962C8B-B14F-4D97-AF65-F5344CB8AC3E}">
-        <p14:creationId xmlns:p14="http://schemas.microsoft.com/office/powerpoint/2010/main" val="2418529465"/>
       </p:ext>
     </p:extLst>
   </p:cSld>
